--- a/docs/说明书重写/答辩PPT/答辩PPT.pptx
+++ b/docs/说明书重写/答辩PPT/答辩PPT.pptx
@@ -1114,7 +1114,7 @@
                 <a:latin typeface="Microsoft YaHei"/>
                 <a:ea typeface="Microsoft YaHei"/>
               </a:rPr>
-              <a:t>31</a:t>
+              <a:t>30</a:t>
             </a:r>
             <a:endParaRPr/>
           </a:p>
@@ -1744,7 +1744,7 @@
                 <a:latin typeface="Microsoft YaHei"/>
                 <a:ea typeface="Microsoft YaHei"/>
               </a:rPr>
-              <a:t>DATABASE · 31 TABLES · 25 MIGRATIONS</a:t>
+              <a:t>DATABASE · 30 TABLES · 25 MIGRATIONS</a:t>
             </a:r>
             <a:endParaRPr/>
           </a:p>
@@ -1951,7 +1951,7 @@
                 <a:latin typeface="Microsoft YaHei"/>
                 <a:ea typeface="Microsoft YaHei"/>
               </a:rPr>
-              <a:t>31</a:t>
+              <a:t>30</a:t>
             </a:r>
             <a:endParaRPr/>
           </a:p>
@@ -2103,7 +2103,7 @@
                 <a:latin typeface="Microsoft YaHei"/>
                 <a:ea typeface="Microsoft YaHei"/>
               </a:rPr>
-              <a:t> · 7 </a:t>
+              <a:t> · 6 </a:t>
             </a:r>
             <a:r>
               <a:rPr lang="zh-CN" sz="825">
@@ -5299,7 +5299,7 @@
                 <a:latin typeface="Microsoft YaHei"/>
                 <a:ea typeface="Microsoft YaHei"/>
               </a:rPr>
-              <a:t>31</a:t>
+              <a:t>30</a:t>
             </a:r>
             <a:endParaRPr/>
           </a:p>
